--- a/courses/learn_placement/module04-01-timing-driven-place/slides.pptx
+++ b/courses/learn_placement/module04-01-timing-driven-place/slides.pptx
@@ -16,6 +16,9 @@
     <p:sldId id="264" r:id="rId16"/>
     <p:sldId id="265" r:id="rId17"/>
     <p:sldId id="266" r:id="rId18"/>
+    <p:sldId id="267" r:id="rId19"/>
+    <p:sldId id="268" r:id="rId20"/>
+    <p:sldId id="269" r:id="rId21"/>
   </p:sldIdLst>
   <p:sldSz cx="12191695" cy="6858000" type="screen4x3"/>
   <p:notesSz cx="6858000" cy="9144000"/>
@@ -582,7 +585,7 @@
           <a:lstStyle/>
           <a:p>
             <a:r>
-              <a:t>Common traps: celebrating HPWL while cells pile into one bin; ignoring fixed pads A and D; mixing bbox and clique models in one report; keeping only the final SA iterate instead of the best; and forgetting that timing weights change the objective, not just the label.</a:t>
+              <a:t>In the browser lab track, open the **timing-driven-place** lab from the tools shelf. Load the starter placement, run the algorithm once, and read HPWL—and density when the panel shows it. Work the challenges that lock the goldens, then come back to implement the same loop yourself.</a:t>
             </a:r>
           </a:p>
         </p:txBody>
@@ -652,6 +655,146 @@
           <a:lstStyle/>
           <a:p>
             <a:r>
+              <a:t>In the implement track, open this module's EXAMPLES.md Pseudocode section and the course common solvers. Parse `tiny_place.json`, run the algorithm with a deterministic seed, and print coordinates plus HPWL. Match the browser goldens before you claim the checklist.</a:t>
+            </a:r>
+          </a:p>
+        </p:txBody>
+      </p:sp>
+      <p:sp>
+        <p:nvSpPr>
+          <p:cNvPr id="4" name="Slide Number Placeholder 3"/>
+          <p:cNvSpPr>
+            <a:spLocks noGrp="1"/>
+          </p:cNvSpPr>
+          <p:nvPr>
+            <p:ph type="sldNum" idx="5" sz="quarter"/>
+          </p:nvPr>
+        </p:nvSpPr>
+        <p:spPr/>
+      </p:sp>
+    </p:spTree>
+  </p:cSld>
+  <p:clrMapOvr>
+    <a:masterClrMapping/>
+  </p:clrMapOvr>
+</p:notes>
+</file>
+
+<file path=ppt/notesSlides/notesSlide12.xml><?xml version="1.0" encoding="utf-8"?>
+<p:notes xmlns:a="http://schemas.openxmlformats.org/drawingml/2006/main" xmlns:p="http://schemas.openxmlformats.org/presentationml/2006/main" xmlns:r="http://schemas.openxmlformats.org/officeDocument/2006/relationships">
+  <p:cSld>
+    <p:spTree>
+      <p:nvGrpSpPr>
+        <p:cNvPr id="1" name=""/>
+        <p:cNvGrpSpPr/>
+        <p:nvPr/>
+      </p:nvGrpSpPr>
+      <p:grpSpPr>
+        <a:xfrm>
+          <a:off x="0" y="0"/>
+          <a:ext cx="0" cy="0"/>
+          <a:chOff x="0" y="0"/>
+          <a:chExt cx="0" cy="0"/>
+        </a:xfrm>
+      </p:grpSpPr>
+      <p:sp>
+        <p:nvSpPr>
+          <p:cNvPr id="2" name="Slide Image Placeholder 1"/>
+          <p:cNvSpPr>
+            <a:spLocks noGrp="1"/>
+          </p:cNvSpPr>
+          <p:nvPr>
+            <p:ph type="sldImg" idx="2"/>
+          </p:nvPr>
+        </p:nvSpPr>
+        <p:spPr/>
+      </p:sp>
+      <p:sp>
+        <p:nvSpPr>
+          <p:cNvPr id="3" name="Notes Placeholder 2"/>
+          <p:cNvSpPr>
+            <a:spLocks noGrp="1"/>
+          </p:cNvSpPr>
+          <p:nvPr>
+            <p:ph type="body" idx="3" sz="quarter"/>
+          </p:nvPr>
+        </p:nvSpPr>
+        <p:spPr/>
+        <p:txBody>
+          <a:bodyPr/>
+          <a:lstStyle/>
+          <a:p>
+            <a:r>
+              <a:t>Common traps: celebrating HPWL while cells pile into one bin; ignoring fixed pads A and D; mixing bbox and clique models in one report; keeping only the final SA iterate instead of the best; and forgetting that timing weights change the objective, not just the label.</a:t>
+            </a:r>
+          </a:p>
+        </p:txBody>
+      </p:sp>
+      <p:sp>
+        <p:nvSpPr>
+          <p:cNvPr id="4" name="Slide Number Placeholder 3"/>
+          <p:cNvSpPr>
+            <a:spLocks noGrp="1"/>
+          </p:cNvSpPr>
+          <p:nvPr>
+            <p:ph type="sldNum" idx="5" sz="quarter"/>
+          </p:nvPr>
+        </p:nvSpPr>
+        <p:spPr/>
+      </p:sp>
+    </p:spTree>
+  </p:cSld>
+  <p:clrMapOvr>
+    <a:masterClrMapping/>
+  </p:clrMapOvr>
+</p:notes>
+</file>
+
+<file path=ppt/notesSlides/notesSlide13.xml><?xml version="1.0" encoding="utf-8"?>
+<p:notes xmlns:a="http://schemas.openxmlformats.org/drawingml/2006/main" xmlns:p="http://schemas.openxmlformats.org/presentationml/2006/main" xmlns:r="http://schemas.openxmlformats.org/officeDocument/2006/relationships">
+  <p:cSld>
+    <p:spTree>
+      <p:nvGrpSpPr>
+        <p:cNvPr id="1" name=""/>
+        <p:cNvGrpSpPr/>
+        <p:nvPr/>
+      </p:nvGrpSpPr>
+      <p:grpSpPr>
+        <a:xfrm>
+          <a:off x="0" y="0"/>
+          <a:ext cx="0" cy="0"/>
+          <a:chOff x="0" y="0"/>
+          <a:chExt cx="0" cy="0"/>
+        </a:xfrm>
+      </p:grpSpPr>
+      <p:sp>
+        <p:nvSpPr>
+          <p:cNvPr id="2" name="Slide Image Placeholder 1"/>
+          <p:cNvSpPr>
+            <a:spLocks noGrp="1"/>
+          </p:cNvSpPr>
+          <p:nvPr>
+            <p:ph type="sldImg" idx="2"/>
+          </p:nvPr>
+        </p:nvSpPr>
+        <p:spPr/>
+      </p:sp>
+      <p:sp>
+        <p:nvSpPr>
+          <p:cNvPr id="3" name="Notes Placeholder 2"/>
+          <p:cNvSpPr>
+            <a:spLocks noGrp="1"/>
+          </p:cNvSpPr>
+          <p:nvPr>
+            <p:ph type="body" idx="3" sz="quarter"/>
+          </p:nvPr>
+        </p:nvSpPr>
+        <p:spPr/>
+        <p:txBody>
+          <a:bodyPr/>
+          <a:lstStyle/>
+          <a:p>
+            <a:r>
               <a:t>Complete the checklist for at least one track—preferably both. Implement until your metrics match the starter goldens. When you’re ready, take the short quiz, then continue to the next module.</a:t>
             </a:r>
           </a:p>
@@ -725,12 +868,6 @@
               <a:t>Multiply each net’s HPWL by its criticality weight and sum. Heavy weights pull critical nets shorter even when plain HPWL looks fine. Always report both plain and weighted totals so you can see what the objective actually optimized.</a:t>
             </a:r>
           </a:p>
-          <a:p/>
-          <a:p>
-            <a:r>
-              <a:t>&lt;!-- algorithm-walkthrough --&gt;</a:t>
-            </a:r>
-          </a:p>
         </p:txBody>
       </p:sp>
       <p:sp>
@@ -798,7 +935,13 @@
           <a:lstStyle/>
           <a:p>
             <a:r>
-              <a:t>On the starter, plain HPWL is fifty-two, but timing-weighted HPWL is one hundred sixteen because the four-pin net carries weight five.</a:t>
+              <a:t>Timing-driven place multiplies each net’s HPWL by criticality and sums. Pseudocode always reports plain and weighted totals together.</a:t>
+            </a:r>
+          </a:p>
+          <a:p/>
+          <a:p>
+            <a:r>
+              <a:t>Open this module's examples file and find the Pseudocode section. That written sketch is what you implement on the implement track and what the browser challenges measure.</a:t>
             </a:r>
           </a:p>
         </p:txBody>
@@ -868,7 +1011,7 @@
           <a:lstStyle/>
           <a:p>
             <a:r>
-              <a:t>Multiply each net’s bbox HPWL by its criticality and sum. The critical ABCD net alone contributes five times sixteen equals eighty on the starter.</a:t>
+              <a:t>Starter plain fifty-two becomes timing one hundred sixteen because the four-pin net has weight five. Compact golden drops timing cost to thirty.</a:t>
             </a:r>
           </a:p>
         </p:txBody>
@@ -938,7 +1081,7 @@
           <a:lstStyle/>
           <a:p>
             <a:r>
-              <a:t>The compact golden cuts the critical bbox sharply. Timing-weighted HPWL falls from one hundred sixteen to thirty while plain HPWL hits fourteen.</a:t>
+              <a:t>On the starter, plain HPWL is fifty-two, but timing-weighted HPWL is one hundred sixteen because the four-pin net carries weight five.</a:t>
             </a:r>
           </a:p>
         </p:txBody>
@@ -1008,7 +1151,7 @@
           <a:lstStyle/>
           <a:p>
             <a:r>
-              <a:t>A placement can look fine on plain HPWL while the critical net stays long. Timing labs demand both numbers so the objective is visible.</a:t>
+              <a:t>Multiply each net’s bbox HPWL by its criticality and sum. The critical ABCD net alone contributes five times sixteen equals eighty on the starter.</a:t>
             </a:r>
           </a:p>
         </p:txBody>
@@ -1078,13 +1221,7 @@
           <a:lstStyle/>
           <a:p>
             <a:r>
-              <a:t>Timing-driven place is still wirelength—just weighted. Remember one hundred sixteen to thirty on this instance, and never drop the plain HPWL report.</a:t>
-            </a:r>
-          </a:p>
-          <a:p/>
-          <a:p>
-            <a:r>
-              <a:t>&lt;!-- /algorithm-walkthrough --&gt;</a:t>
+              <a:t>The compact golden cuts the critical bbox sharply. Timing-weighted HPWL falls from one hundred sixteen to thirty while plain HPWL hits fourteen.</a:t>
             </a:r>
           </a:p>
         </p:txBody>
@@ -1154,7 +1291,7 @@
           <a:lstStyle/>
           <a:p>
             <a:r>
-              <a:t>In the browser lab track, open the **timing-driven-place** lab from the tools shelf. Load the starter placement, run the algorithm once, and read HPWL—and density when the panel shows it. Work the challenges that lock the goldens, then come back to implement the same loop yourself.</a:t>
+              <a:t>A placement can look fine on plain HPWL while the critical net stays long. Timing labs demand both numbers so the objective is visible.</a:t>
             </a:r>
           </a:p>
         </p:txBody>
@@ -1224,7 +1361,7 @@
           <a:lstStyle/>
           <a:p>
             <a:r>
-              <a:t>In the implement track, open this module’s examples and the course `common/` solvers. Parse `tiny_place.json`, run the algorithm with a deterministic seed, and print coordinates plus HPWL. Match the browser goldens before you claim the checklist.</a:t>
+              <a:t>Timing-driven place is still wirelength—just weighted. Remember one hundred sixteen to thirty on this instance, and never drop the plain HPWL report.</a:t>
             </a:r>
           </a:p>
         </p:txBody>
@@ -4382,21 +4519,45 @@
                 </a:solidFill>
                 <a:latin typeface="Calibri"/>
               </a:rPr>
-              <a:t>Pitfalls</a:t>
-            </a:r>
-          </a:p>
-        </p:txBody>
-      </p:sp>
-      <p:sp>
-        <p:nvSpPr>
-          <p:cNvPr id="3" name="TextBox 2"/>
+              <a:t>Weights change what you optimize</a:t>
+            </a:r>
+          </a:p>
+        </p:txBody>
+      </p:sp>
+      <p:pic>
+        <p:nvPicPr>
+          <p:cNvPr id="3" name="Picture 2" descr="05-takeaway.png"/>
+          <p:cNvPicPr>
+            <a:picLocks noChangeAspect="1"/>
+          </p:cNvPicPr>
+          <p:nvPr/>
+        </p:nvPicPr>
+        <p:blipFill>
+          <a:blip r:embed="rId2"/>
+          <a:stretch>
+            <a:fillRect/>
+          </a:stretch>
+        </p:blipFill>
+        <p:spPr>
+          <a:xfrm>
+            <a:off x="548640" y="1143000"/>
+            <a:ext cx="9404113" cy="4572000"/>
+          </a:xfrm>
+          <a:prstGeom prst="rect">
+            <a:avLst/>
+          </a:prstGeom>
+        </p:spPr>
+      </p:pic>
+      <p:sp>
+        <p:nvSpPr>
+          <p:cNvPr id="4" name="TextBox 3"/>
           <p:cNvSpPr txBox="1"/>
           <p:nvPr/>
         </p:nvSpPr>
         <p:spPr>
           <a:xfrm>
-            <a:off x="548640" y="1234440"/>
-            <a:ext cx="11064240" cy="4937760"/>
+            <a:off x="548640" y="5897880"/>
+            <a:ext cx="11064240" cy="411480"/>
           </a:xfrm>
           <a:prstGeom prst="rect">
             <a:avLst/>
@@ -4409,32 +4570,26 @@
           </a:bodyPr>
           <a:lstStyle/>
           <a:p>
-            <a:pPr lvl="0" marL="457200" indent="-228600">
-              <a:buFont typeface="Calibri"/>
-              <a:spcAft>
-                <a:spcPts val="1000"/>
-              </a:spcAft>
-              <a:buSzPct val="100000"/>
-              <a:buChar char="•"/>
+            <a:pPr>
               <a:lnSpc>
                 <a:spcPts val="2200"/>
               </a:lnSpc>
             </a:pPr>
             <a:r>
-              <a:rPr sz="2000" b="0">
+              <a:rPr sz="1200" b="0">
                 <a:solidFill>
                   <a:srgbClr val="333333"/>
                 </a:solidFill>
                 <a:latin typeface="Calibri"/>
               </a:rPr>
-              <a:t>Common traps</a:t>
-            </a:r>
-          </a:p>
-        </p:txBody>
-      </p:sp>
-      <p:sp>
-        <p:nvSpPr>
-          <p:cNvPr id="4" name="TextBox 3"/>
+              <a:t>Weights change what you optimize</a:t>
+            </a:r>
+          </a:p>
+        </p:txBody>
+      </p:sp>
+      <p:sp>
+        <p:nvSpPr>
+          <p:cNvPr id="5" name="TextBox 4"/>
           <p:cNvSpPr txBox="1"/>
           <p:nvPr/>
         </p:nvSpPr>
@@ -4523,6 +4678,535 @@
                 </a:solidFill>
                 <a:latin typeface="Calibri"/>
               </a:rPr>
+              <a:t>Browser lab track</a:t>
+            </a:r>
+          </a:p>
+        </p:txBody>
+      </p:sp>
+      <p:sp>
+        <p:nvSpPr>
+          <p:cNvPr id="3" name="TextBox 2"/>
+          <p:cNvSpPr txBox="1"/>
+          <p:nvPr/>
+        </p:nvSpPr>
+        <p:spPr>
+          <a:xfrm>
+            <a:off x="548640" y="1234440"/>
+            <a:ext cx="11064240" cy="4937760"/>
+          </a:xfrm>
+          <a:prstGeom prst="rect">
+            <a:avLst/>
+          </a:prstGeom>
+          <a:noFill/>
+        </p:spPr>
+        <p:txBody>
+          <a:bodyPr wrap="square">
+            <a:noAutofit/>
+          </a:bodyPr>
+          <a:lstStyle/>
+          <a:p>
+            <a:pPr lvl="0" marL="457200" indent="-228600">
+              <a:buFont typeface="Calibri"/>
+              <a:spcAft>
+                <a:spcPts val="1000"/>
+              </a:spcAft>
+              <a:buSzPct val="100000"/>
+              <a:buChar char="•"/>
+              <a:lnSpc>
+                <a:spcPts val="2200"/>
+              </a:lnSpc>
+            </a:pPr>
+            <a:r>
+              <a:rPr sz="2000" b="0">
+                <a:solidFill>
+                  <a:srgbClr val="333333"/>
+                </a:solidFill>
+                <a:latin typeface="Calibri"/>
+              </a:rPr>
+              <a:t>In the browser lab track, open the </a:t>
+            </a:r>
+            <a:r>
+              <a:rPr sz="2000" b="1">
+                <a:solidFill>
+                  <a:srgbClr val="333333"/>
+                </a:solidFill>
+                <a:latin typeface="Calibri"/>
+              </a:rPr>
+              <a:t>timing-driven-place</a:t>
+            </a:r>
+            <a:r>
+              <a:rPr sz="2000" b="0">
+                <a:solidFill>
+                  <a:srgbClr val="333333"/>
+                </a:solidFill>
+                <a:latin typeface="Calibri"/>
+              </a:rPr>
+              <a:t> lab from the tools shelf</a:t>
+            </a:r>
+          </a:p>
+          <a:p>
+            <a:pPr lvl="0" marL="457200" indent="-228600">
+              <a:buFont typeface="Calibri"/>
+              <a:spcAft>
+                <a:spcPts val="1000"/>
+              </a:spcAft>
+              <a:buSzPct val="100000"/>
+              <a:buChar char="•"/>
+              <a:lnSpc>
+                <a:spcPts val="2200"/>
+              </a:lnSpc>
+            </a:pPr>
+            <a:r>
+              <a:rPr sz="2000" b="0">
+                <a:solidFill>
+                  <a:srgbClr val="333333"/>
+                </a:solidFill>
+                <a:latin typeface="Calibri"/>
+              </a:rPr>
+              <a:t>Load the starter placement, run the algorithm once</a:t>
+            </a:r>
+          </a:p>
+          <a:p>
+            <a:pPr lvl="0" marL="457200" indent="-228600">
+              <a:buFont typeface="Calibri"/>
+              <a:spcAft>
+                <a:spcPts val="1000"/>
+              </a:spcAft>
+              <a:buSzPct val="100000"/>
+              <a:buChar char="•"/>
+              <a:lnSpc>
+                <a:spcPts val="2200"/>
+              </a:lnSpc>
+            </a:pPr>
+            <a:r>
+              <a:rPr sz="2000" b="0">
+                <a:solidFill>
+                  <a:srgbClr val="333333"/>
+                </a:solidFill>
+                <a:latin typeface="Calibri"/>
+              </a:rPr>
+              <a:t>Work the challenges that lock the goldens</a:t>
+            </a:r>
+          </a:p>
+        </p:txBody>
+      </p:sp>
+      <p:sp>
+        <p:nvSpPr>
+          <p:cNvPr id="4" name="TextBox 3"/>
+          <p:cNvSpPr txBox="1"/>
+          <p:nvPr/>
+        </p:nvSpPr>
+        <p:spPr>
+          <a:xfrm>
+            <a:off x="548640" y="6355080"/>
+            <a:ext cx="11064240" cy="320040"/>
+          </a:xfrm>
+          <a:prstGeom prst="rect">
+            <a:avLst/>
+          </a:prstGeom>
+          <a:noFill/>
+        </p:spPr>
+        <p:txBody>
+          <a:bodyPr wrap="square">
+            <a:noAutofit/>
+          </a:bodyPr>
+          <a:lstStyle/>
+          <a:p>
+            <a:pPr algn="r">
+              <a:lnSpc>
+                <a:spcPts val="2200"/>
+              </a:lnSpc>
+              <a:defRPr sz="1000" b="0">
+                <a:solidFill>
+                  <a:srgbClr val="666666"/>
+                </a:solidFill>
+                <a:latin typeface="Calibri"/>
+              </a:defRPr>
+            </a:pPr>
+            <a:r>
+              <a:t>learn_placement — 01 timing driven place</a:t>
+            </a:r>
+          </a:p>
+        </p:txBody>
+      </p:sp>
+    </p:spTree>
+  </p:cSld>
+  <p:clrMapOvr>
+    <a:masterClrMapping/>
+  </p:clrMapOvr>
+</p:sld>
+</file>
+
+<file path=ppt/slides/slide12.xml><?xml version="1.0" encoding="utf-8"?>
+<p:sld xmlns:a="http://schemas.openxmlformats.org/drawingml/2006/main" xmlns:p="http://schemas.openxmlformats.org/presentationml/2006/main" xmlns:r="http://schemas.openxmlformats.org/officeDocument/2006/relationships">
+  <p:cSld>
+    <p:spTree>
+      <p:nvGrpSpPr>
+        <p:cNvPr id="1" name=""/>
+        <p:cNvGrpSpPr/>
+        <p:nvPr/>
+      </p:nvGrpSpPr>
+      <p:grpSpPr/>
+      <p:sp>
+        <p:nvSpPr>
+          <p:cNvPr id="2" name="TextBox 1"/>
+          <p:cNvSpPr txBox="1"/>
+          <p:nvPr/>
+        </p:nvSpPr>
+        <p:spPr>
+          <a:xfrm>
+            <a:off x="548640" y="411480"/>
+            <a:ext cx="11064240" cy="777240"/>
+          </a:xfrm>
+          <a:prstGeom prst="rect">
+            <a:avLst/>
+          </a:prstGeom>
+          <a:noFill/>
+        </p:spPr>
+        <p:txBody>
+          <a:bodyPr wrap="square">
+            <a:noAutofit/>
+          </a:bodyPr>
+          <a:lstStyle/>
+          <a:p>
+            <a:pPr>
+              <a:lnSpc>
+                <a:spcPts val="2200"/>
+              </a:lnSpc>
+            </a:pPr>
+            <a:r>
+              <a:rPr sz="2800" b="1">
+                <a:solidFill>
+                  <a:srgbClr val="1A1A2E"/>
+                </a:solidFill>
+                <a:latin typeface="Calibri"/>
+              </a:rPr>
+              <a:t>Implement track</a:t>
+            </a:r>
+          </a:p>
+        </p:txBody>
+      </p:sp>
+      <p:sp>
+        <p:nvSpPr>
+          <p:cNvPr id="3" name="TextBox 2"/>
+          <p:cNvSpPr txBox="1"/>
+          <p:nvPr/>
+        </p:nvSpPr>
+        <p:spPr>
+          <a:xfrm>
+            <a:off x="548640" y="1234440"/>
+            <a:ext cx="11064240" cy="4937760"/>
+          </a:xfrm>
+          <a:prstGeom prst="rect">
+            <a:avLst/>
+          </a:prstGeom>
+          <a:noFill/>
+        </p:spPr>
+        <p:txBody>
+          <a:bodyPr wrap="square">
+            <a:noAutofit/>
+          </a:bodyPr>
+          <a:lstStyle/>
+          <a:p>
+            <a:pPr lvl="0" marL="457200" indent="-228600">
+              <a:buFont typeface="Calibri"/>
+              <a:spcAft>
+                <a:spcPts val="1000"/>
+              </a:spcAft>
+              <a:buSzPct val="100000"/>
+              <a:buChar char="•"/>
+              <a:lnSpc>
+                <a:spcPts val="2200"/>
+              </a:lnSpc>
+            </a:pPr>
+            <a:r>
+              <a:rPr sz="2000" b="0">
+                <a:solidFill>
+                  <a:srgbClr val="333333"/>
+                </a:solidFill>
+                <a:latin typeface="Calibri"/>
+              </a:rPr>
+              <a:t>In the implement track</a:t>
+            </a:r>
+          </a:p>
+          <a:p>
+            <a:pPr lvl="0" marL="457200" indent="-228600">
+              <a:buFont typeface="Calibri"/>
+              <a:spcAft>
+                <a:spcPts val="1000"/>
+              </a:spcAft>
+              <a:buSzPct val="100000"/>
+              <a:buChar char="•"/>
+              <a:lnSpc>
+                <a:spcPts val="2200"/>
+              </a:lnSpc>
+            </a:pPr>
+            <a:r>
+              <a:rPr sz="2000" b="0">
+                <a:solidFill>
+                  <a:srgbClr val="333333"/>
+                </a:solidFill>
+                <a:latin typeface="Calibri"/>
+              </a:rPr>
+              <a:t>Parse `tiny_place.json`, run the algorithm with a deterministic seed</a:t>
+            </a:r>
+          </a:p>
+          <a:p>
+            <a:pPr lvl="0" marL="457200" indent="-228600">
+              <a:buFont typeface="Calibri"/>
+              <a:spcAft>
+                <a:spcPts val="1000"/>
+              </a:spcAft>
+              <a:buSzPct val="100000"/>
+              <a:buChar char="•"/>
+              <a:lnSpc>
+                <a:spcPts val="2200"/>
+              </a:lnSpc>
+            </a:pPr>
+            <a:r>
+              <a:rPr sz="2000" b="0">
+                <a:solidFill>
+                  <a:srgbClr val="333333"/>
+                </a:solidFill>
+                <a:latin typeface="Calibri"/>
+              </a:rPr>
+              <a:t>Match the browser goldens before you claim the checklist</a:t>
+            </a:r>
+          </a:p>
+        </p:txBody>
+      </p:sp>
+      <p:sp>
+        <p:nvSpPr>
+          <p:cNvPr id="4" name="TextBox 3"/>
+          <p:cNvSpPr txBox="1"/>
+          <p:nvPr/>
+        </p:nvSpPr>
+        <p:spPr>
+          <a:xfrm>
+            <a:off x="548640" y="6355080"/>
+            <a:ext cx="11064240" cy="320040"/>
+          </a:xfrm>
+          <a:prstGeom prst="rect">
+            <a:avLst/>
+          </a:prstGeom>
+          <a:noFill/>
+        </p:spPr>
+        <p:txBody>
+          <a:bodyPr wrap="square">
+            <a:noAutofit/>
+          </a:bodyPr>
+          <a:lstStyle/>
+          <a:p>
+            <a:pPr algn="r">
+              <a:lnSpc>
+                <a:spcPts val="2200"/>
+              </a:lnSpc>
+              <a:defRPr sz="1000" b="0">
+                <a:solidFill>
+                  <a:srgbClr val="666666"/>
+                </a:solidFill>
+                <a:latin typeface="Calibri"/>
+              </a:defRPr>
+            </a:pPr>
+            <a:r>
+              <a:t>learn_placement — 01 timing driven place</a:t>
+            </a:r>
+          </a:p>
+        </p:txBody>
+      </p:sp>
+    </p:spTree>
+  </p:cSld>
+  <p:clrMapOvr>
+    <a:masterClrMapping/>
+  </p:clrMapOvr>
+</p:sld>
+</file>
+
+<file path=ppt/slides/slide13.xml><?xml version="1.0" encoding="utf-8"?>
+<p:sld xmlns:a="http://schemas.openxmlformats.org/drawingml/2006/main" xmlns:p="http://schemas.openxmlformats.org/presentationml/2006/main" xmlns:r="http://schemas.openxmlformats.org/officeDocument/2006/relationships">
+  <p:cSld>
+    <p:spTree>
+      <p:nvGrpSpPr>
+        <p:cNvPr id="1" name=""/>
+        <p:cNvGrpSpPr/>
+        <p:nvPr/>
+      </p:nvGrpSpPr>
+      <p:grpSpPr/>
+      <p:sp>
+        <p:nvSpPr>
+          <p:cNvPr id="2" name="TextBox 1"/>
+          <p:cNvSpPr txBox="1"/>
+          <p:nvPr/>
+        </p:nvSpPr>
+        <p:spPr>
+          <a:xfrm>
+            <a:off x="548640" y="411480"/>
+            <a:ext cx="11064240" cy="777240"/>
+          </a:xfrm>
+          <a:prstGeom prst="rect">
+            <a:avLst/>
+          </a:prstGeom>
+          <a:noFill/>
+        </p:spPr>
+        <p:txBody>
+          <a:bodyPr wrap="square">
+            <a:noAutofit/>
+          </a:bodyPr>
+          <a:lstStyle/>
+          <a:p>
+            <a:pPr>
+              <a:lnSpc>
+                <a:spcPts val="2200"/>
+              </a:lnSpc>
+            </a:pPr>
+            <a:r>
+              <a:rPr sz="2800" b="1">
+                <a:solidFill>
+                  <a:srgbClr val="1A1A2E"/>
+                </a:solidFill>
+                <a:latin typeface="Calibri"/>
+              </a:rPr>
+              <a:t>Pitfalls</a:t>
+            </a:r>
+          </a:p>
+        </p:txBody>
+      </p:sp>
+      <p:sp>
+        <p:nvSpPr>
+          <p:cNvPr id="3" name="TextBox 2"/>
+          <p:cNvSpPr txBox="1"/>
+          <p:nvPr/>
+        </p:nvSpPr>
+        <p:spPr>
+          <a:xfrm>
+            <a:off x="548640" y="1234440"/>
+            <a:ext cx="11064240" cy="4937760"/>
+          </a:xfrm>
+          <a:prstGeom prst="rect">
+            <a:avLst/>
+          </a:prstGeom>
+          <a:noFill/>
+        </p:spPr>
+        <p:txBody>
+          <a:bodyPr wrap="square">
+            <a:noAutofit/>
+          </a:bodyPr>
+          <a:lstStyle/>
+          <a:p>
+            <a:pPr lvl="0" marL="457200" indent="-228600">
+              <a:buFont typeface="Calibri"/>
+              <a:spcAft>
+                <a:spcPts val="1000"/>
+              </a:spcAft>
+              <a:buSzPct val="100000"/>
+              <a:buChar char="•"/>
+              <a:lnSpc>
+                <a:spcPts val="2200"/>
+              </a:lnSpc>
+            </a:pPr>
+            <a:r>
+              <a:rPr sz="2000" b="0">
+                <a:solidFill>
+                  <a:srgbClr val="333333"/>
+                </a:solidFill>
+                <a:latin typeface="Calibri"/>
+              </a:rPr>
+              <a:t>Common traps</a:t>
+            </a:r>
+          </a:p>
+        </p:txBody>
+      </p:sp>
+      <p:sp>
+        <p:nvSpPr>
+          <p:cNvPr id="4" name="TextBox 3"/>
+          <p:cNvSpPr txBox="1"/>
+          <p:nvPr/>
+        </p:nvSpPr>
+        <p:spPr>
+          <a:xfrm>
+            <a:off x="548640" y="6355080"/>
+            <a:ext cx="11064240" cy="320040"/>
+          </a:xfrm>
+          <a:prstGeom prst="rect">
+            <a:avLst/>
+          </a:prstGeom>
+          <a:noFill/>
+        </p:spPr>
+        <p:txBody>
+          <a:bodyPr wrap="square">
+            <a:noAutofit/>
+          </a:bodyPr>
+          <a:lstStyle/>
+          <a:p>
+            <a:pPr algn="r">
+              <a:lnSpc>
+                <a:spcPts val="2200"/>
+              </a:lnSpc>
+              <a:defRPr sz="1000" b="0">
+                <a:solidFill>
+                  <a:srgbClr val="666666"/>
+                </a:solidFill>
+                <a:latin typeface="Calibri"/>
+              </a:defRPr>
+            </a:pPr>
+            <a:r>
+              <a:t>learn_placement — 01 timing driven place</a:t>
+            </a:r>
+          </a:p>
+        </p:txBody>
+      </p:sp>
+    </p:spTree>
+  </p:cSld>
+  <p:clrMapOvr>
+    <a:masterClrMapping/>
+  </p:clrMapOvr>
+</p:sld>
+</file>
+
+<file path=ppt/slides/slide14.xml><?xml version="1.0" encoding="utf-8"?>
+<p:sld xmlns:a="http://schemas.openxmlformats.org/drawingml/2006/main" xmlns:p="http://schemas.openxmlformats.org/presentationml/2006/main" xmlns:r="http://schemas.openxmlformats.org/officeDocument/2006/relationships">
+  <p:cSld>
+    <p:spTree>
+      <p:nvGrpSpPr>
+        <p:cNvPr id="1" name=""/>
+        <p:cNvGrpSpPr/>
+        <p:nvPr/>
+      </p:nvGrpSpPr>
+      <p:grpSpPr/>
+      <p:sp>
+        <p:nvSpPr>
+          <p:cNvPr id="2" name="TextBox 1"/>
+          <p:cNvSpPr txBox="1"/>
+          <p:nvPr/>
+        </p:nvSpPr>
+        <p:spPr>
+          <a:xfrm>
+            <a:off x="548640" y="411480"/>
+            <a:ext cx="11064240" cy="777240"/>
+          </a:xfrm>
+          <a:prstGeom prst="rect">
+            <a:avLst/>
+          </a:prstGeom>
+          <a:noFill/>
+        </p:spPr>
+        <p:txBody>
+          <a:bodyPr wrap="square">
+            <a:noAutofit/>
+          </a:bodyPr>
+          <a:lstStyle/>
+          <a:p>
+            <a:pPr>
+              <a:lnSpc>
+                <a:spcPts val="2200"/>
+              </a:lnSpc>
+            </a:pPr>
+            <a:r>
+              <a:rPr sz="2800" b="1">
+                <a:solidFill>
+                  <a:srgbClr val="1A1A2E"/>
+                </a:solidFill>
+                <a:latin typeface="Calibri"/>
+              </a:rPr>
               <a:t>Your turn</a:t>
             </a:r>
           </a:p>
@@ -4800,6 +5484,125 @@
               <a:t>Always report both plain and weighted totals so you can see what the objective actually</a:t>
             </a:r>
           </a:p>
+        </p:txBody>
+      </p:sp>
+      <p:sp>
+        <p:nvSpPr>
+          <p:cNvPr id="4" name="TextBox 3"/>
+          <p:cNvSpPr txBox="1"/>
+          <p:nvPr/>
+        </p:nvSpPr>
+        <p:spPr>
+          <a:xfrm>
+            <a:off x="548640" y="6355080"/>
+            <a:ext cx="11064240" cy="320040"/>
+          </a:xfrm>
+          <a:prstGeom prst="rect">
+            <a:avLst/>
+          </a:prstGeom>
+          <a:noFill/>
+        </p:spPr>
+        <p:txBody>
+          <a:bodyPr wrap="square">
+            <a:noAutofit/>
+          </a:bodyPr>
+          <a:lstStyle/>
+          <a:p>
+            <a:pPr algn="r">
+              <a:lnSpc>
+                <a:spcPts val="2200"/>
+              </a:lnSpc>
+              <a:defRPr sz="1000" b="0">
+                <a:solidFill>
+                  <a:srgbClr val="666666"/>
+                </a:solidFill>
+                <a:latin typeface="Calibri"/>
+              </a:defRPr>
+            </a:pPr>
+            <a:r>
+              <a:t>learn_placement — 01 timing driven place</a:t>
+            </a:r>
+          </a:p>
+        </p:txBody>
+      </p:sp>
+    </p:spTree>
+  </p:cSld>
+  <p:clrMapOvr>
+    <a:masterClrMapping/>
+  </p:clrMapOvr>
+</p:sld>
+</file>
+
+<file path=ppt/slides/slide3.xml><?xml version="1.0" encoding="utf-8"?>
+<p:sld xmlns:a="http://schemas.openxmlformats.org/drawingml/2006/main" xmlns:p="http://schemas.openxmlformats.org/presentationml/2006/main" xmlns:r="http://schemas.openxmlformats.org/officeDocument/2006/relationships">
+  <p:cSld>
+    <p:spTree>
+      <p:nvGrpSpPr>
+        <p:cNvPr id="1" name=""/>
+        <p:cNvGrpSpPr/>
+        <p:nvPr/>
+      </p:nvGrpSpPr>
+      <p:grpSpPr/>
+      <p:sp>
+        <p:nvSpPr>
+          <p:cNvPr id="2" name="TextBox 1"/>
+          <p:cNvSpPr txBox="1"/>
+          <p:nvPr/>
+        </p:nvSpPr>
+        <p:spPr>
+          <a:xfrm>
+            <a:off x="548640" y="411480"/>
+            <a:ext cx="11064240" cy="777240"/>
+          </a:xfrm>
+          <a:prstGeom prst="rect">
+            <a:avLst/>
+          </a:prstGeom>
+          <a:noFill/>
+        </p:spPr>
+        <p:txBody>
+          <a:bodyPr wrap="square">
+            <a:noAutofit/>
+          </a:bodyPr>
+          <a:lstStyle/>
+          <a:p>
+            <a:pPr>
+              <a:lnSpc>
+                <a:spcPts val="2200"/>
+              </a:lnSpc>
+            </a:pPr>
+            <a:r>
+              <a:rPr sz="2800" b="1">
+                <a:solidFill>
+                  <a:srgbClr val="1A1A2E"/>
+                </a:solidFill>
+                <a:latin typeface="Calibri"/>
+              </a:rPr>
+              <a:t>Pseudocode</a:t>
+            </a:r>
+          </a:p>
+        </p:txBody>
+      </p:sp>
+      <p:sp>
+        <p:nvSpPr>
+          <p:cNvPr id="3" name="TextBox 2"/>
+          <p:cNvSpPr txBox="1"/>
+          <p:nvPr/>
+        </p:nvSpPr>
+        <p:spPr>
+          <a:xfrm>
+            <a:off x="548640" y="1234440"/>
+            <a:ext cx="11064240" cy="4937760"/>
+          </a:xfrm>
+          <a:prstGeom prst="rect">
+            <a:avLst/>
+          </a:prstGeom>
+          <a:noFill/>
+        </p:spPr>
+        <p:txBody>
+          <a:bodyPr wrap="square">
+            <a:noAutofit/>
+          </a:bodyPr>
+          <a:lstStyle/>
           <a:p>
             <a:pPr lvl="0" marL="457200" indent="-228600">
               <a:buFont typeface="Calibri"/>
@@ -4819,7 +5622,73 @@
                 </a:solidFill>
                 <a:latin typeface="Calibri"/>
               </a:rPr>
-              <a:t>&lt;!-- algorithm-walkthrough --&gt;</a:t>
+              <a:t>Timing-driven place multiplies each net’s HPWL by criticality and sums</a:t>
+            </a:r>
+          </a:p>
+          <a:p>
+            <a:pPr lvl="0" marL="457200" indent="-228600">
+              <a:buFont typeface="Calibri"/>
+              <a:spcAft>
+                <a:spcPts val="1000"/>
+              </a:spcAft>
+              <a:buSzPct val="100000"/>
+              <a:buChar char="•"/>
+              <a:lnSpc>
+                <a:spcPts val="2200"/>
+              </a:lnSpc>
+            </a:pPr>
+            <a:r>
+              <a:rPr sz="2000" b="0">
+                <a:solidFill>
+                  <a:srgbClr val="333333"/>
+                </a:solidFill>
+                <a:latin typeface="Calibri"/>
+              </a:rPr>
+              <a:t>Pseudocode always reports plain and weighted totals together</a:t>
+            </a:r>
+          </a:p>
+          <a:p>
+            <a:pPr lvl="0" marL="457200" indent="-228600">
+              <a:buFont typeface="Calibri"/>
+              <a:spcAft>
+                <a:spcPts val="1000"/>
+              </a:spcAft>
+              <a:buSzPct val="100000"/>
+              <a:buChar char="•"/>
+              <a:lnSpc>
+                <a:spcPts val="2200"/>
+              </a:lnSpc>
+            </a:pPr>
+            <a:r>
+              <a:rPr sz="2000" b="0">
+                <a:solidFill>
+                  <a:srgbClr val="333333"/>
+                </a:solidFill>
+                <a:latin typeface="Calibri"/>
+              </a:rPr>
+              <a:t>Open this module's examples file and find the Pseudocode section</a:t>
+            </a:r>
+          </a:p>
+          <a:p>
+            <a:pPr lvl="0" marL="457200" indent="-228600">
+              <a:buFont typeface="Calibri"/>
+              <a:spcAft>
+                <a:spcPts val="1000"/>
+              </a:spcAft>
+              <a:buSzPct val="100000"/>
+              <a:buChar char="•"/>
+              <a:lnSpc>
+                <a:spcPts val="2200"/>
+              </a:lnSpc>
+            </a:pPr>
+            <a:r>
+              <a:rPr sz="2000" b="0">
+                <a:solidFill>
+                  <a:srgbClr val="333333"/>
+                </a:solidFill>
+                <a:latin typeface="Calibri"/>
+              </a:rPr>
+              <a:t>That written sketch is what you implement on the implement track and what the browser</a:t>
             </a:r>
           </a:p>
         </p:txBody>
@@ -4871,7 +5740,424 @@
 </p:sld>
 </file>
 
-<file path=ppt/slides/slide3.xml><?xml version="1.0" encoding="utf-8"?>
+<file path=ppt/slides/slide4.xml><?xml version="1.0" encoding="utf-8"?>
+<p:sld xmlns:a="http://schemas.openxmlformats.org/drawingml/2006/main" xmlns:p="http://schemas.openxmlformats.org/presentationml/2006/main" xmlns:r="http://schemas.openxmlformats.org/officeDocument/2006/relationships">
+  <p:cSld>
+    <p:spTree>
+      <p:nvGrpSpPr>
+        <p:cNvPr id="1" name=""/>
+        <p:cNvGrpSpPr/>
+        <p:nvPr/>
+      </p:nvGrpSpPr>
+      <p:grpSpPr/>
+      <p:sp>
+        <p:nvSpPr>
+          <p:cNvPr id="2" name="TextBox 1"/>
+          <p:cNvSpPr txBox="1"/>
+          <p:nvPr/>
+        </p:nvSpPr>
+        <p:spPr>
+          <a:xfrm>
+            <a:off x="548640" y="411480"/>
+            <a:ext cx="11064240" cy="777240"/>
+          </a:xfrm>
+          <a:prstGeom prst="rect">
+            <a:avLst/>
+          </a:prstGeom>
+          <a:noFill/>
+        </p:spPr>
+        <p:txBody>
+          <a:bodyPr wrap="square">
+            <a:noAutofit/>
+          </a:bodyPr>
+          <a:lstStyle/>
+          <a:p>
+            <a:pPr>
+              <a:lnSpc>
+                <a:spcPts val="2200"/>
+              </a:lnSpc>
+            </a:pPr>
+            <a:r>
+              <a:rPr sz="2800" b="1">
+                <a:solidFill>
+                  <a:srgbClr val="1A1A2E"/>
+                </a:solidFill>
+                <a:latin typeface="Calibri"/>
+              </a:rPr>
+              <a:t>Algorithm sketch</a:t>
+            </a:r>
+          </a:p>
+        </p:txBody>
+      </p:sp>
+      <p:sp>
+        <p:nvSpPr>
+          <p:cNvPr id="3" name="TextBox 2"/>
+          <p:cNvSpPr txBox="1"/>
+          <p:nvPr/>
+        </p:nvSpPr>
+        <p:spPr>
+          <a:xfrm>
+            <a:off x="548640" y="1234440"/>
+            <a:ext cx="11064240" cy="4937760"/>
+          </a:xfrm>
+          <a:prstGeom prst="rect">
+            <a:avLst/>
+          </a:prstGeom>
+          <a:noFill/>
+        </p:spPr>
+        <p:txBody>
+          <a:bodyPr wrap="square">
+            <a:noAutofit/>
+          </a:bodyPr>
+          <a:lstStyle/>
+          <a:p>
+            <a:pPr lvl="0" marL="457200" indent="-228600">
+              <a:buFont typeface="Calibri"/>
+              <a:spcAft>
+                <a:spcPts val="1000"/>
+              </a:spcAft>
+              <a:buSzPct val="100000"/>
+              <a:buChar char="•"/>
+              <a:lnSpc>
+                <a:spcPts val="2200"/>
+              </a:lnSpc>
+            </a:pPr>
+            <a:r>
+              <a:rPr sz="2000" b="0">
+                <a:solidFill>
+                  <a:srgbClr val="333333"/>
+                </a:solidFill>
+                <a:latin typeface="Calibri"/>
+              </a:rPr>
+              <a:t>Starter plain fifty-two becomes timing one hundred sixteen because the four-pin net has</a:t>
+            </a:r>
+          </a:p>
+          <a:p>
+            <a:pPr lvl="0" marL="457200" indent="-228600">
+              <a:buFont typeface="Calibri"/>
+              <a:spcAft>
+                <a:spcPts val="1000"/>
+              </a:spcAft>
+              <a:buSzPct val="100000"/>
+              <a:buChar char="•"/>
+              <a:lnSpc>
+                <a:spcPts val="2200"/>
+              </a:lnSpc>
+            </a:pPr>
+            <a:r>
+              <a:rPr sz="2000" b="0">
+                <a:solidFill>
+                  <a:srgbClr val="333333"/>
+                </a:solidFill>
+                <a:latin typeface="Calibri"/>
+              </a:rPr>
+              <a:t>Compact golden drops timing cost to thirty</a:t>
+            </a:r>
+          </a:p>
+        </p:txBody>
+      </p:sp>
+      <p:sp>
+        <p:nvSpPr>
+          <p:cNvPr id="4" name="TextBox 3"/>
+          <p:cNvSpPr txBox="1"/>
+          <p:nvPr/>
+        </p:nvSpPr>
+        <p:spPr>
+          <a:xfrm>
+            <a:off x="548640" y="6355080"/>
+            <a:ext cx="11064240" cy="320040"/>
+          </a:xfrm>
+          <a:prstGeom prst="rect">
+            <a:avLst/>
+          </a:prstGeom>
+          <a:noFill/>
+        </p:spPr>
+        <p:txBody>
+          <a:bodyPr wrap="square">
+            <a:noAutofit/>
+          </a:bodyPr>
+          <a:lstStyle/>
+          <a:p>
+            <a:pPr algn="r">
+              <a:lnSpc>
+                <a:spcPts val="2200"/>
+              </a:lnSpc>
+              <a:defRPr sz="1000" b="0">
+                <a:solidFill>
+                  <a:srgbClr val="666666"/>
+                </a:solidFill>
+                <a:latin typeface="Calibri"/>
+              </a:defRPr>
+            </a:pPr>
+            <a:r>
+              <a:t>learn_placement — 01 timing driven place</a:t>
+            </a:r>
+          </a:p>
+        </p:txBody>
+      </p:sp>
+    </p:spTree>
+  </p:cSld>
+  <p:clrMapOvr>
+    <a:masterClrMapping/>
+  </p:clrMapOvr>
+</p:sld>
+</file>
+
+<file path=ppt/slides/slide5.xml><?xml version="1.0" encoding="utf-8"?>
+<p:sld xmlns:a="http://schemas.openxmlformats.org/drawingml/2006/main" xmlns:p="http://schemas.openxmlformats.org/presentationml/2006/main" xmlns:r="http://schemas.openxmlformats.org/officeDocument/2006/relationships">
+  <p:cSld>
+    <p:spTree>
+      <p:nvGrpSpPr>
+        <p:cNvPr id="1" name=""/>
+        <p:cNvGrpSpPr/>
+        <p:nvPr/>
+      </p:nvGrpSpPr>
+      <p:grpSpPr/>
+      <p:sp>
+        <p:nvSpPr>
+          <p:cNvPr id="2" name="TextBox 1"/>
+          <p:cNvSpPr txBox="1"/>
+          <p:nvPr/>
+        </p:nvSpPr>
+        <p:spPr>
+          <a:xfrm>
+            <a:off x="548640" y="411480"/>
+            <a:ext cx="11064240" cy="777240"/>
+          </a:xfrm>
+          <a:prstGeom prst="rect">
+            <a:avLst/>
+          </a:prstGeom>
+          <a:noFill/>
+        </p:spPr>
+        <p:txBody>
+          <a:bodyPr wrap="square">
+            <a:noAutofit/>
+          </a:bodyPr>
+          <a:lstStyle/>
+          <a:p>
+            <a:pPr>
+              <a:lnSpc>
+                <a:spcPts val="2200"/>
+              </a:lnSpc>
+            </a:pPr>
+            <a:r>
+              <a:rPr sz="2800" b="1">
+                <a:solidFill>
+                  <a:srgbClr val="1A1A2E"/>
+                </a:solidFill>
+                <a:latin typeface="Calibri"/>
+              </a:rPr>
+              <a:t>Algorithm sketch — try these</a:t>
+            </a:r>
+          </a:p>
+        </p:txBody>
+      </p:sp>
+      <p:sp>
+        <p:nvSpPr>
+          <p:cNvPr id="3" name="TextBox 2"/>
+          <p:cNvSpPr txBox="1"/>
+          <p:nvPr/>
+        </p:nvSpPr>
+        <p:spPr>
+          <a:xfrm>
+            <a:off x="548640" y="1143000"/>
+            <a:ext cx="11064240" cy="5029200"/>
+          </a:xfrm>
+          <a:prstGeom prst="rect">
+            <a:avLst/>
+          </a:prstGeom>
+          <a:solidFill>
+            <a:srgbClr val="F4F4F4"/>
+          </a:solidFill>
+        </p:spPr>
+        <p:txBody>
+          <a:bodyPr wrap="square">
+            <a:noAutofit/>
+          </a:bodyPr>
+          <a:lstStyle/>
+          <a:p>
+            <a:pPr>
+              <a:lnSpc>
+                <a:spcPts val="2200"/>
+              </a:lnSpc>
+              <a:spcAft>
+                <a:spcPts val="400"/>
+              </a:spcAft>
+            </a:pPr>
+            <a:r>
+              <a:rPr sz="2000" b="0">
+                <a:solidFill>
+                  <a:srgbClr val="333333"/>
+                </a:solidFill>
+                <a:latin typeface="Consolas"/>
+              </a:rPr>
+              <a:t>INPUT: positions, nets, weights w[net]</a:t>
+            </a:r>
+          </a:p>
+          <a:p>
+            <a:pPr>
+              <a:lnSpc>
+                <a:spcPts val="2200"/>
+              </a:lnSpc>
+              <a:spcAft>
+                <a:spcPts val="400"/>
+              </a:spcAft>
+            </a:pPr>
+            <a:r>
+              <a:rPr sz="2000" b="0">
+                <a:solidFill>
+                  <a:srgbClr val="333333"/>
+                </a:solidFill>
+                <a:latin typeface="Consolas"/>
+              </a:rPr>
+              <a:t>OUTPUT: plain HPWL, timing HPWL</a:t>
+            </a:r>
+          </a:p>
+          <a:p>
+            <a:pPr>
+              <a:lnSpc>
+                <a:spcPts val="2200"/>
+              </a:lnSpc>
+              <a:spcAft>
+                <a:spcPts val="400"/>
+              </a:spcAft>
+            </a:pPr>
+            <a:r>
+              <a:rPr sz="2000" b="0">
+                <a:solidFill>
+                  <a:srgbClr val="333333"/>
+                </a:solidFill>
+                <a:latin typeface="Consolas"/>
+              </a:rPr>
+              <a:t>plain ← Σ HPWL(net)</a:t>
+            </a:r>
+          </a:p>
+          <a:p>
+            <a:pPr>
+              <a:lnSpc>
+                <a:spcPts val="2200"/>
+              </a:lnSpc>
+              <a:spcAft>
+                <a:spcPts val="400"/>
+              </a:spcAft>
+            </a:pPr>
+            <a:r>
+              <a:rPr sz="2000" b="0">
+                <a:solidFill>
+                  <a:srgbClr val="333333"/>
+                </a:solidFill>
+                <a:latin typeface="Consolas"/>
+              </a:rPr>
+              <a:t>timing ← Σ w[net]·HPWL(net)</a:t>
+            </a:r>
+          </a:p>
+          <a:p>
+            <a:pPr>
+              <a:lnSpc>
+                <a:spcPts val="2200"/>
+              </a:lnSpc>
+              <a:spcAft>
+                <a:spcPts val="400"/>
+              </a:spcAft>
+            </a:pPr>
+            <a:r>
+              <a:rPr sz="2000" b="0">
+                <a:solidFill>
+                  <a:srgbClr val="333333"/>
+                </a:solidFill>
+                <a:latin typeface="Consolas"/>
+              </a:rPr>
+              <a:t>optimize timing (or report both)</a:t>
+            </a:r>
+          </a:p>
+          <a:p>
+            <a:pPr>
+              <a:lnSpc>
+                <a:spcPts val="2200"/>
+              </a:lnSpc>
+              <a:spcAft>
+                <a:spcPts val="400"/>
+              </a:spcAft>
+            </a:pPr>
+            <a:r>
+              <a:rPr sz="2000" b="0">
+                <a:solidFill>
+                  <a:srgbClr val="333333"/>
+                </a:solidFill>
+                <a:latin typeface="Consolas"/>
+              </a:rPr>
+              <a:t>GOLDEN starter: plain=52 timing=116</a:t>
+            </a:r>
+          </a:p>
+          <a:p>
+            <a:pPr>
+              <a:lnSpc>
+                <a:spcPts val="2200"/>
+              </a:lnSpc>
+              <a:spcAft>
+                <a:spcPts val="400"/>
+              </a:spcAft>
+            </a:pPr>
+            <a:r>
+              <a:rPr sz="2000" b="0">
+                <a:solidFill>
+                  <a:srgbClr val="333333"/>
+                </a:solidFill>
+                <a:latin typeface="Consolas"/>
+              </a:rPr>
+              <a:t>compact: plain=14 timing=30</a:t>
+            </a:r>
+          </a:p>
+        </p:txBody>
+      </p:sp>
+      <p:sp>
+        <p:nvSpPr>
+          <p:cNvPr id="4" name="TextBox 3"/>
+          <p:cNvSpPr txBox="1"/>
+          <p:nvPr/>
+        </p:nvSpPr>
+        <p:spPr>
+          <a:xfrm>
+            <a:off x="548640" y="6355080"/>
+            <a:ext cx="11064240" cy="320040"/>
+          </a:xfrm>
+          <a:prstGeom prst="rect">
+            <a:avLst/>
+          </a:prstGeom>
+          <a:noFill/>
+        </p:spPr>
+        <p:txBody>
+          <a:bodyPr wrap="square">
+            <a:noAutofit/>
+          </a:bodyPr>
+          <a:lstStyle/>
+          <a:p>
+            <a:pPr algn="r">
+              <a:lnSpc>
+                <a:spcPts val="2200"/>
+              </a:lnSpc>
+              <a:defRPr sz="1000" b="0">
+                <a:solidFill>
+                  <a:srgbClr val="666666"/>
+                </a:solidFill>
+                <a:latin typeface="Calibri"/>
+              </a:defRPr>
+            </a:pPr>
+            <a:r>
+              <a:t>learn_placement — 01 timing driven place</a:t>
+            </a:r>
+          </a:p>
+        </p:txBody>
+      </p:sp>
+    </p:spTree>
+  </p:cSld>
+  <p:clrMapOvr>
+    <a:masterClrMapping/>
+  </p:clrMapOvr>
+</p:sld>
+</file>
+
+<file path=ppt/slides/slide6.xml><?xml version="1.0" encoding="utf-8"?>
 <p:sld xmlns:a="http://schemas.openxmlformats.org/drawingml/2006/main" xmlns:p="http://schemas.openxmlformats.org/presentationml/2006/main" xmlns:r="http://schemas.openxmlformats.org/officeDocument/2006/relationships">
   <p:cSld>
     <p:spTree>
@@ -5030,7 +6316,7 @@
 </p:sld>
 </file>
 
-<file path=ppt/slides/slide4.xml><?xml version="1.0" encoding="utf-8"?>
+<file path=ppt/slides/slide7.xml><?xml version="1.0" encoding="utf-8"?>
 <p:sld xmlns:a="http://schemas.openxmlformats.org/drawingml/2006/main" xmlns:p="http://schemas.openxmlformats.org/presentationml/2006/main" xmlns:r="http://schemas.openxmlformats.org/officeDocument/2006/relationships">
   <p:cSld>
     <p:spTree>
@@ -5189,7 +6475,7 @@
 </p:sld>
 </file>
 
-<file path=ppt/slides/slide5.xml><?xml version="1.0" encoding="utf-8"?>
+<file path=ppt/slides/slide8.xml><?xml version="1.0" encoding="utf-8"?>
 <p:sld xmlns:a="http://schemas.openxmlformats.org/drawingml/2006/main" xmlns:p="http://schemas.openxmlformats.org/presentationml/2006/main" xmlns:r="http://schemas.openxmlformats.org/officeDocument/2006/relationships">
   <p:cSld>
     <p:spTree>
@@ -5348,7 +6634,7 @@
 </p:sld>
 </file>
 
-<file path=ppt/slides/slide6.xml><?xml version="1.0" encoding="utf-8"?>
+<file path=ppt/slides/slide9.xml><?xml version="1.0" encoding="utf-8"?>
 <p:sld xmlns:a="http://schemas.openxmlformats.org/drawingml/2006/main" xmlns:p="http://schemas.openxmlformats.org/presentationml/2006/main" xmlns:r="http://schemas.openxmlformats.org/officeDocument/2006/relationships">
   <p:cSld>
     <p:spTree>
@@ -5463,553 +6749,6 @@
       <p:sp>
         <p:nvSpPr>
           <p:cNvPr id="5" name="TextBox 4"/>
-          <p:cNvSpPr txBox="1"/>
-          <p:nvPr/>
-        </p:nvSpPr>
-        <p:spPr>
-          <a:xfrm>
-            <a:off x="548640" y="6355080"/>
-            <a:ext cx="11064240" cy="320040"/>
-          </a:xfrm>
-          <a:prstGeom prst="rect">
-            <a:avLst/>
-          </a:prstGeom>
-          <a:noFill/>
-        </p:spPr>
-        <p:txBody>
-          <a:bodyPr wrap="square">
-            <a:noAutofit/>
-          </a:bodyPr>
-          <a:lstStyle/>
-          <a:p>
-            <a:pPr algn="r">
-              <a:lnSpc>
-                <a:spcPts val="2200"/>
-              </a:lnSpc>
-              <a:defRPr sz="1000" b="0">
-                <a:solidFill>
-                  <a:srgbClr val="666666"/>
-                </a:solidFill>
-                <a:latin typeface="Calibri"/>
-              </a:defRPr>
-            </a:pPr>
-            <a:r>
-              <a:t>learn_placement — 01 timing driven place</a:t>
-            </a:r>
-          </a:p>
-        </p:txBody>
-      </p:sp>
-    </p:spTree>
-  </p:cSld>
-  <p:clrMapOvr>
-    <a:masterClrMapping/>
-  </p:clrMapOvr>
-</p:sld>
-</file>
-
-<file path=ppt/slides/slide7.xml><?xml version="1.0" encoding="utf-8"?>
-<p:sld xmlns:a="http://schemas.openxmlformats.org/drawingml/2006/main" xmlns:p="http://schemas.openxmlformats.org/presentationml/2006/main" xmlns:r="http://schemas.openxmlformats.org/officeDocument/2006/relationships">
-  <p:cSld>
-    <p:spTree>
-      <p:nvGrpSpPr>
-        <p:cNvPr id="1" name=""/>
-        <p:cNvGrpSpPr/>
-        <p:nvPr/>
-      </p:nvGrpSpPr>
-      <p:grpSpPr/>
-      <p:sp>
-        <p:nvSpPr>
-          <p:cNvPr id="2" name="TextBox 1"/>
-          <p:cNvSpPr txBox="1"/>
-          <p:nvPr/>
-        </p:nvSpPr>
-        <p:spPr>
-          <a:xfrm>
-            <a:off x="548640" y="411480"/>
-            <a:ext cx="11064240" cy="777240"/>
-          </a:xfrm>
-          <a:prstGeom prst="rect">
-            <a:avLst/>
-          </a:prstGeom>
-          <a:noFill/>
-        </p:spPr>
-        <p:txBody>
-          <a:bodyPr wrap="square">
-            <a:noAutofit/>
-          </a:bodyPr>
-          <a:lstStyle/>
-          <a:p>
-            <a:pPr>
-              <a:lnSpc>
-                <a:spcPts val="2200"/>
-              </a:lnSpc>
-            </a:pPr>
-            <a:r>
-              <a:rPr sz="2800" b="1">
-                <a:solidFill>
-                  <a:srgbClr val="1A1A2E"/>
-                </a:solidFill>
-                <a:latin typeface="Calibri"/>
-              </a:rPr>
-              <a:t>Weights change what you optimize</a:t>
-            </a:r>
-          </a:p>
-        </p:txBody>
-      </p:sp>
-      <p:pic>
-        <p:nvPicPr>
-          <p:cNvPr id="3" name="Picture 2" descr="05-takeaway.png"/>
-          <p:cNvPicPr>
-            <a:picLocks noChangeAspect="1"/>
-          </p:cNvPicPr>
-          <p:nvPr/>
-        </p:nvPicPr>
-        <p:blipFill>
-          <a:blip r:embed="rId2"/>
-          <a:stretch>
-            <a:fillRect/>
-          </a:stretch>
-        </p:blipFill>
-        <p:spPr>
-          <a:xfrm>
-            <a:off x="548640" y="1143000"/>
-            <a:ext cx="9404113" cy="4572000"/>
-          </a:xfrm>
-          <a:prstGeom prst="rect">
-            <a:avLst/>
-          </a:prstGeom>
-        </p:spPr>
-      </p:pic>
-      <p:sp>
-        <p:nvSpPr>
-          <p:cNvPr id="4" name="TextBox 3"/>
-          <p:cNvSpPr txBox="1"/>
-          <p:nvPr/>
-        </p:nvSpPr>
-        <p:spPr>
-          <a:xfrm>
-            <a:off x="548640" y="5897880"/>
-            <a:ext cx="11064240" cy="411480"/>
-          </a:xfrm>
-          <a:prstGeom prst="rect">
-            <a:avLst/>
-          </a:prstGeom>
-          <a:noFill/>
-        </p:spPr>
-        <p:txBody>
-          <a:bodyPr wrap="square">
-            <a:noAutofit/>
-          </a:bodyPr>
-          <a:lstStyle/>
-          <a:p>
-            <a:pPr>
-              <a:lnSpc>
-                <a:spcPts val="2200"/>
-              </a:lnSpc>
-            </a:pPr>
-            <a:r>
-              <a:rPr sz="1200" b="0">
-                <a:solidFill>
-                  <a:srgbClr val="333333"/>
-                </a:solidFill>
-                <a:latin typeface="Calibri"/>
-              </a:rPr>
-              <a:t>Weights change what you optimize</a:t>
-            </a:r>
-          </a:p>
-        </p:txBody>
-      </p:sp>
-      <p:sp>
-        <p:nvSpPr>
-          <p:cNvPr id="5" name="TextBox 4"/>
-          <p:cNvSpPr txBox="1"/>
-          <p:nvPr/>
-        </p:nvSpPr>
-        <p:spPr>
-          <a:xfrm>
-            <a:off x="548640" y="6355080"/>
-            <a:ext cx="11064240" cy="320040"/>
-          </a:xfrm>
-          <a:prstGeom prst="rect">
-            <a:avLst/>
-          </a:prstGeom>
-          <a:noFill/>
-        </p:spPr>
-        <p:txBody>
-          <a:bodyPr wrap="square">
-            <a:noAutofit/>
-          </a:bodyPr>
-          <a:lstStyle/>
-          <a:p>
-            <a:pPr algn="r">
-              <a:lnSpc>
-                <a:spcPts val="2200"/>
-              </a:lnSpc>
-              <a:defRPr sz="1000" b="0">
-                <a:solidFill>
-                  <a:srgbClr val="666666"/>
-                </a:solidFill>
-                <a:latin typeface="Calibri"/>
-              </a:defRPr>
-            </a:pPr>
-            <a:r>
-              <a:t>learn_placement — 01 timing driven place</a:t>
-            </a:r>
-          </a:p>
-        </p:txBody>
-      </p:sp>
-    </p:spTree>
-  </p:cSld>
-  <p:clrMapOvr>
-    <a:masterClrMapping/>
-  </p:clrMapOvr>
-</p:sld>
-</file>
-
-<file path=ppt/slides/slide8.xml><?xml version="1.0" encoding="utf-8"?>
-<p:sld xmlns:a="http://schemas.openxmlformats.org/drawingml/2006/main" xmlns:p="http://schemas.openxmlformats.org/presentationml/2006/main" xmlns:r="http://schemas.openxmlformats.org/officeDocument/2006/relationships">
-  <p:cSld>
-    <p:spTree>
-      <p:nvGrpSpPr>
-        <p:cNvPr id="1" name=""/>
-        <p:cNvGrpSpPr/>
-        <p:nvPr/>
-      </p:nvGrpSpPr>
-      <p:grpSpPr/>
-      <p:sp>
-        <p:nvSpPr>
-          <p:cNvPr id="2" name="TextBox 1"/>
-          <p:cNvSpPr txBox="1"/>
-          <p:nvPr/>
-        </p:nvSpPr>
-        <p:spPr>
-          <a:xfrm>
-            <a:off x="548640" y="411480"/>
-            <a:ext cx="11064240" cy="777240"/>
-          </a:xfrm>
-          <a:prstGeom prst="rect">
-            <a:avLst/>
-          </a:prstGeom>
-          <a:noFill/>
-        </p:spPr>
-        <p:txBody>
-          <a:bodyPr wrap="square">
-            <a:noAutofit/>
-          </a:bodyPr>
-          <a:lstStyle/>
-          <a:p>
-            <a:pPr>
-              <a:lnSpc>
-                <a:spcPts val="2200"/>
-              </a:lnSpc>
-            </a:pPr>
-            <a:r>
-              <a:rPr sz="2800" b="1">
-                <a:solidFill>
-                  <a:srgbClr val="1A1A2E"/>
-                </a:solidFill>
-                <a:latin typeface="Calibri"/>
-              </a:rPr>
-              <a:t>Browser lab track</a:t>
-            </a:r>
-          </a:p>
-        </p:txBody>
-      </p:sp>
-      <p:sp>
-        <p:nvSpPr>
-          <p:cNvPr id="3" name="TextBox 2"/>
-          <p:cNvSpPr txBox="1"/>
-          <p:nvPr/>
-        </p:nvSpPr>
-        <p:spPr>
-          <a:xfrm>
-            <a:off x="548640" y="1234440"/>
-            <a:ext cx="11064240" cy="4937760"/>
-          </a:xfrm>
-          <a:prstGeom prst="rect">
-            <a:avLst/>
-          </a:prstGeom>
-          <a:noFill/>
-        </p:spPr>
-        <p:txBody>
-          <a:bodyPr wrap="square">
-            <a:noAutofit/>
-          </a:bodyPr>
-          <a:lstStyle/>
-          <a:p>
-            <a:pPr lvl="0" marL="457200" indent="-228600">
-              <a:buFont typeface="Calibri"/>
-              <a:spcAft>
-                <a:spcPts val="1000"/>
-              </a:spcAft>
-              <a:buSzPct val="100000"/>
-              <a:buChar char="•"/>
-              <a:lnSpc>
-                <a:spcPts val="2200"/>
-              </a:lnSpc>
-            </a:pPr>
-            <a:r>
-              <a:rPr sz="2000" b="0">
-                <a:solidFill>
-                  <a:srgbClr val="333333"/>
-                </a:solidFill>
-                <a:latin typeface="Calibri"/>
-              </a:rPr>
-              <a:t>In the browser lab track, open the </a:t>
-            </a:r>
-            <a:r>
-              <a:rPr sz="2000" b="1">
-                <a:solidFill>
-                  <a:srgbClr val="333333"/>
-                </a:solidFill>
-                <a:latin typeface="Calibri"/>
-              </a:rPr>
-              <a:t>timing-driven-place</a:t>
-            </a:r>
-            <a:r>
-              <a:rPr sz="2000" b="0">
-                <a:solidFill>
-                  <a:srgbClr val="333333"/>
-                </a:solidFill>
-                <a:latin typeface="Calibri"/>
-              </a:rPr>
-              <a:t> lab from the tools shelf</a:t>
-            </a:r>
-          </a:p>
-          <a:p>
-            <a:pPr lvl="0" marL="457200" indent="-228600">
-              <a:buFont typeface="Calibri"/>
-              <a:spcAft>
-                <a:spcPts val="1000"/>
-              </a:spcAft>
-              <a:buSzPct val="100000"/>
-              <a:buChar char="•"/>
-              <a:lnSpc>
-                <a:spcPts val="2200"/>
-              </a:lnSpc>
-            </a:pPr>
-            <a:r>
-              <a:rPr sz="2000" b="0">
-                <a:solidFill>
-                  <a:srgbClr val="333333"/>
-                </a:solidFill>
-                <a:latin typeface="Calibri"/>
-              </a:rPr>
-              <a:t>Load the starter placement, run the algorithm once</a:t>
-            </a:r>
-          </a:p>
-          <a:p>
-            <a:pPr lvl="0" marL="457200" indent="-228600">
-              <a:buFont typeface="Calibri"/>
-              <a:spcAft>
-                <a:spcPts val="1000"/>
-              </a:spcAft>
-              <a:buSzPct val="100000"/>
-              <a:buChar char="•"/>
-              <a:lnSpc>
-                <a:spcPts val="2200"/>
-              </a:lnSpc>
-            </a:pPr>
-            <a:r>
-              <a:rPr sz="2000" b="0">
-                <a:solidFill>
-                  <a:srgbClr val="333333"/>
-                </a:solidFill>
-                <a:latin typeface="Calibri"/>
-              </a:rPr>
-              <a:t>Work the challenges that lock the goldens</a:t>
-            </a:r>
-          </a:p>
-        </p:txBody>
-      </p:sp>
-      <p:sp>
-        <p:nvSpPr>
-          <p:cNvPr id="4" name="TextBox 3"/>
-          <p:cNvSpPr txBox="1"/>
-          <p:nvPr/>
-        </p:nvSpPr>
-        <p:spPr>
-          <a:xfrm>
-            <a:off x="548640" y="6355080"/>
-            <a:ext cx="11064240" cy="320040"/>
-          </a:xfrm>
-          <a:prstGeom prst="rect">
-            <a:avLst/>
-          </a:prstGeom>
-          <a:noFill/>
-        </p:spPr>
-        <p:txBody>
-          <a:bodyPr wrap="square">
-            <a:noAutofit/>
-          </a:bodyPr>
-          <a:lstStyle/>
-          <a:p>
-            <a:pPr algn="r">
-              <a:lnSpc>
-                <a:spcPts val="2200"/>
-              </a:lnSpc>
-              <a:defRPr sz="1000" b="0">
-                <a:solidFill>
-                  <a:srgbClr val="666666"/>
-                </a:solidFill>
-                <a:latin typeface="Calibri"/>
-              </a:defRPr>
-            </a:pPr>
-            <a:r>
-              <a:t>learn_placement — 01 timing driven place</a:t>
-            </a:r>
-          </a:p>
-        </p:txBody>
-      </p:sp>
-    </p:spTree>
-  </p:cSld>
-  <p:clrMapOvr>
-    <a:masterClrMapping/>
-  </p:clrMapOvr>
-</p:sld>
-</file>
-
-<file path=ppt/slides/slide9.xml><?xml version="1.0" encoding="utf-8"?>
-<p:sld xmlns:a="http://schemas.openxmlformats.org/drawingml/2006/main" xmlns:p="http://schemas.openxmlformats.org/presentationml/2006/main" xmlns:r="http://schemas.openxmlformats.org/officeDocument/2006/relationships">
-  <p:cSld>
-    <p:spTree>
-      <p:nvGrpSpPr>
-        <p:cNvPr id="1" name=""/>
-        <p:cNvGrpSpPr/>
-        <p:nvPr/>
-      </p:nvGrpSpPr>
-      <p:grpSpPr/>
-      <p:sp>
-        <p:nvSpPr>
-          <p:cNvPr id="2" name="TextBox 1"/>
-          <p:cNvSpPr txBox="1"/>
-          <p:nvPr/>
-        </p:nvSpPr>
-        <p:spPr>
-          <a:xfrm>
-            <a:off x="548640" y="411480"/>
-            <a:ext cx="11064240" cy="777240"/>
-          </a:xfrm>
-          <a:prstGeom prst="rect">
-            <a:avLst/>
-          </a:prstGeom>
-          <a:noFill/>
-        </p:spPr>
-        <p:txBody>
-          <a:bodyPr wrap="square">
-            <a:noAutofit/>
-          </a:bodyPr>
-          <a:lstStyle/>
-          <a:p>
-            <a:pPr>
-              <a:lnSpc>
-                <a:spcPts val="2200"/>
-              </a:lnSpc>
-            </a:pPr>
-            <a:r>
-              <a:rPr sz="2800" b="1">
-                <a:solidFill>
-                  <a:srgbClr val="1A1A2E"/>
-                </a:solidFill>
-                <a:latin typeface="Calibri"/>
-              </a:rPr>
-              <a:t>Implement track</a:t>
-            </a:r>
-          </a:p>
-        </p:txBody>
-      </p:sp>
-      <p:sp>
-        <p:nvSpPr>
-          <p:cNvPr id="3" name="TextBox 2"/>
-          <p:cNvSpPr txBox="1"/>
-          <p:nvPr/>
-        </p:nvSpPr>
-        <p:spPr>
-          <a:xfrm>
-            <a:off x="548640" y="1234440"/>
-            <a:ext cx="11064240" cy="4937760"/>
-          </a:xfrm>
-          <a:prstGeom prst="rect">
-            <a:avLst/>
-          </a:prstGeom>
-          <a:noFill/>
-        </p:spPr>
-        <p:txBody>
-          <a:bodyPr wrap="square">
-            <a:noAutofit/>
-          </a:bodyPr>
-          <a:lstStyle/>
-          <a:p>
-            <a:pPr lvl="0" marL="457200" indent="-228600">
-              <a:buFont typeface="Calibri"/>
-              <a:spcAft>
-                <a:spcPts val="1000"/>
-              </a:spcAft>
-              <a:buSzPct val="100000"/>
-              <a:buChar char="•"/>
-              <a:lnSpc>
-                <a:spcPts val="2200"/>
-              </a:lnSpc>
-            </a:pPr>
-            <a:r>
-              <a:rPr sz="2000" b="0">
-                <a:solidFill>
-                  <a:srgbClr val="333333"/>
-                </a:solidFill>
-                <a:latin typeface="Calibri"/>
-              </a:rPr>
-              <a:t>In the implement track, open this module’s examples and the course `common/` solvers</a:t>
-            </a:r>
-          </a:p>
-          <a:p>
-            <a:pPr lvl="0" marL="457200" indent="-228600">
-              <a:buFont typeface="Calibri"/>
-              <a:spcAft>
-                <a:spcPts val="1000"/>
-              </a:spcAft>
-              <a:buSzPct val="100000"/>
-              <a:buChar char="•"/>
-              <a:lnSpc>
-                <a:spcPts val="2200"/>
-              </a:lnSpc>
-            </a:pPr>
-            <a:r>
-              <a:rPr sz="2000" b="0">
-                <a:solidFill>
-                  <a:srgbClr val="333333"/>
-                </a:solidFill>
-                <a:latin typeface="Calibri"/>
-              </a:rPr>
-              <a:t>Parse `tiny_place.json`, run the algorithm with a deterministic seed</a:t>
-            </a:r>
-          </a:p>
-          <a:p>
-            <a:pPr lvl="0" marL="457200" indent="-228600">
-              <a:buFont typeface="Calibri"/>
-              <a:spcAft>
-                <a:spcPts val="1000"/>
-              </a:spcAft>
-              <a:buSzPct val="100000"/>
-              <a:buChar char="•"/>
-              <a:lnSpc>
-                <a:spcPts val="2200"/>
-              </a:lnSpc>
-            </a:pPr>
-            <a:r>
-              <a:rPr sz="2000" b="0">
-                <a:solidFill>
-                  <a:srgbClr val="333333"/>
-                </a:solidFill>
-                <a:latin typeface="Calibri"/>
-              </a:rPr>
-              <a:t>Match the browser goldens before you claim the checklist</a:t>
-            </a:r>
-          </a:p>
-        </p:txBody>
-      </p:sp>
-      <p:sp>
-        <p:nvSpPr>
-          <p:cNvPr id="4" name="TextBox 3"/>
           <p:cNvSpPr txBox="1"/>
           <p:nvPr/>
         </p:nvSpPr>
